--- a/dist/초3/수학/도형과측정/초3_수학_도형과측정_08_길이의덧셈과뺄셈_학생용.pptx
+++ b/dist/초3/수학/도형과측정/초3_수학_도형과측정_08_길이의덧셈과뺄셈_학생용.pptx
@@ -121,13 +121,13 @@
   <p:extLst>
     <p:ext uri="{521415D9-36F7-43E2-AB2F-B90AF26B5E84}">
       <p14:sectionLst xmlns:p14="http://schemas.microsoft.com/office/powerpoint/2010/main">
-        <p14:section name="도입" id="{06cd817f-0751-f06f-0736-7830d75bfcbe}">
+        <p14:section name="도입" id="{cde5cd81-616d-aa93-c380-2502467a89d8}">
           <p14:sldIdLst>
             <p14:sldId id="256"/>
             <p14:sldId id="257"/>
           </p14:sldIdLst>
         </p14:section>
-        <p14:section name="개념" id="{faa215c9-ae12-f514-e99a-748af17e1aa4}">
+        <p14:section name="개념" id="{74f6ad87-e74a-120b-65d9-2671455c5d9d}">
           <p14:sldIdLst>
             <p14:sldId id="258"/>
             <p14:sldId id="259"/>
@@ -137,31 +137,31 @@
             <p14:sldId id="265"/>
           </p14:sldIdLst>
         </p14:section>
-        <p14:section name="연습" id="{47c98407-f175-7f3b-46c2-bcb9980d611c}">
+        <p14:section name="연습" id="{0bcbb325-8cbe-1285-e345-dd4b747a28aa}">
           <p14:sldIdLst>
             <p14:sldId id="262"/>
             <p14:sldId id="263"/>
             <p14:sldId id="266"/>
           </p14:sldIdLst>
         </p14:section>
-        <p14:section name="개념" id="{678cb79d-1259-cc32-4e79-2732cc82f3ae}">
+        <p14:section name="개념" id="{2fb78c11-1473-1c1a-9668-67401f9f26a1}">
           <p14:sldIdLst/>
         </p14:section>
-        <p14:section name="연습" id="{d4fffcd9-4e9f-1713-7a1f-b875c811fc80}">
+        <p14:section name="연습" id="{fec9a2b4-d4a2-984f-5eda-ba1094142096}">
           <p14:sldIdLst/>
         </p14:section>
-        <p14:section name="확인" id="{9a06abcb-0f24-cd72-ea9b-50f01071b49c}">
+        <p14:section name="확인" id="{d7164a6b-a6dd-2672-3ea8-0add90d7fdda}">
           <p14:sldIdLst>
             <p14:sldId id="267"/>
             <p14:sldId id="268"/>
           </p14:sldIdLst>
         </p14:section>
-        <p14:section name="정리" id="{7a5ac9a0-d234-d8a5-6e3c-aeeca0e8ec36}">
+        <p14:section name="정리" id="{32083d6e-0b70-d150-f43c-913435705cc4}">
           <p14:sldIdLst>
             <p14:sldId id="269"/>
           </p14:sldIdLst>
         </p14:section>
-        <p14:section name="보충" id="{690a7f7e-f8ea-fd23-6ce3-f22f97209fc8}">
+        <p14:section name="보충" id="{9c41f0ee-e37f-d293-186c-2687b2556f76}">
           <p14:sldIdLst>
             <p14:sldId id="270"/>
           </p14:sldIdLst>
